--- a/slides/HAALSA_Q1_deck.pptx
+++ b/slides/HAALSA_Q1_deck.pptx
@@ -1971,7 +1971,7 @@
                   <a:schemeClr val="bg1"/>
                 </a:solidFill>
               </a:rPr>
-              <a:t>HAALSI Waves 1–3  ·  [Team name]  ·  [Names]</a:t>
+              <a:t>HAALSI Waves 1–3  ·  HAALSI Data Hackathon, Oct 2026  ·  [Names]</a:t>
             </a:r>
             <a:endParaRPr lang="en-US" sz="1800" dirty="0"/>
           </a:p>
